--- a/tests/testdata/excel/PowerPoint/非表示スライド.pptx
+++ b/tests/testdata/excel/PowerPoint/非表示スライド.pptx
@@ -109,13 +109,13 @@
   <p:extLst>
     <p:ext uri="{521415D9-36F7-43E2-AB2F-B90AF26B5E84}">
       <p14:sectionLst xmlns:p14="http://schemas.microsoft.com/office/powerpoint/2010/main">
-        <p14:section name="TC21 セクション名1" id="{37EF9EC4-EAF9-4AA4-82B0-9137ED454DB0}">
+        <p14:section name="TC21 セクション名1" id="{69AEDCEB-474B-4B0B-9DBA-A28F467FF5B8}">
           <p14:sldIdLst>
             <p14:sldId id="256"/>
             <p14:sldId id="257"/>
           </p14:sldIdLst>
         </p14:section>
-        <p14:section name="TC21 セクション名2" id="{4B88B81F-FF9E-40C3-9BCC-A172F9D809E0}">
+        <p14:section name="TC21 セクション名2" id="{0F2E6E4E-8561-43AF-9163-2005558F76AC}">
           <p14:sldIdLst>
             <p14:sldId id="258"/>
           </p14:sldIdLst>
@@ -148,7 +148,7 @@
           <p:cNvPr id="2" name="タイトル 1">
             <a:extLst>
               <a:ext uri="{FF2B5EF4-FFF2-40B4-BE49-F238E27FC236}">
-                <a16:creationId xmlns:a16="http://schemas.microsoft.com/office/drawing/2014/main" id="{1A7FCB3C-DD1F-D90A-AA55-6823EBDE63A8}"/>
+                <a16:creationId xmlns:a16="http://schemas.microsoft.com/office/drawing/2014/main" id="{6BBCCB67-F402-C0D3-635E-609138BB4CFC}"/>
               </a:ext>
             </a:extLst>
           </p:cNvPr>
@@ -185,7 +185,7 @@
           <p:cNvPr id="3" name="字幕 2">
             <a:extLst>
               <a:ext uri="{FF2B5EF4-FFF2-40B4-BE49-F238E27FC236}">
-                <a16:creationId xmlns:a16="http://schemas.microsoft.com/office/drawing/2014/main" id="{3EC6362B-F7D4-E9F8-F744-F6BACA6C494C}"/>
+                <a16:creationId xmlns:a16="http://schemas.microsoft.com/office/drawing/2014/main" id="{64208845-8DFA-CDB4-4B32-CFA84EB4CDF1}"/>
               </a:ext>
             </a:extLst>
           </p:cNvPr>
@@ -255,7 +255,7 @@
           <p:cNvPr id="4" name="日付プレースホルダー 3">
             <a:extLst>
               <a:ext uri="{FF2B5EF4-FFF2-40B4-BE49-F238E27FC236}">
-                <a16:creationId xmlns:a16="http://schemas.microsoft.com/office/drawing/2014/main" id="{59788EEF-453D-6D9D-B772-7BEC59D2146B}"/>
+                <a16:creationId xmlns:a16="http://schemas.microsoft.com/office/drawing/2014/main" id="{F6FF6486-E3BE-7E27-681F-50E1364F6E4E}"/>
               </a:ext>
             </a:extLst>
           </p:cNvPr>
@@ -271,7 +271,7 @@
           <a:bodyPr/>
           <a:lstStyle/>
           <a:p>
-            <a:fld id="{C606910E-A98E-481D-9CC4-C8B77A34EE55}" type="datetimeFigureOut">
+            <a:fld id="{F009DF12-3B71-43E6-B118-1E05C3EF7468}" type="datetimeFigureOut">
               <a:rPr kumimoji="1" lang="ja-JP" altLang="en-US" smtClean="0"/>
               <a:t>2026/9/20</a:t>
             </a:fld>
@@ -284,7 +284,7 @@
           <p:cNvPr id="5" name="フッター プレースホルダー 4">
             <a:extLst>
               <a:ext uri="{FF2B5EF4-FFF2-40B4-BE49-F238E27FC236}">
-                <a16:creationId xmlns:a16="http://schemas.microsoft.com/office/drawing/2014/main" id="{3ADEB583-4641-7B14-A625-93F40A3F4C09}"/>
+                <a16:creationId xmlns:a16="http://schemas.microsoft.com/office/drawing/2014/main" id="{DD0CCA73-9C42-49A6-EAAE-4211BBC28382}"/>
               </a:ext>
             </a:extLst>
           </p:cNvPr>
@@ -309,7 +309,7 @@
           <p:cNvPr id="6" name="スライド番号プレースホルダー 5">
             <a:extLst>
               <a:ext uri="{FF2B5EF4-FFF2-40B4-BE49-F238E27FC236}">
-                <a16:creationId xmlns:a16="http://schemas.microsoft.com/office/drawing/2014/main" id="{5C192811-69DB-0FF5-EEBC-AF82B026DD64}"/>
+                <a16:creationId xmlns:a16="http://schemas.microsoft.com/office/drawing/2014/main" id="{3F405F27-AE0F-5AAF-A23C-E1979FE310FC}"/>
               </a:ext>
             </a:extLst>
           </p:cNvPr>
@@ -325,7 +325,7 @@
           <a:bodyPr/>
           <a:lstStyle/>
           <a:p>
-            <a:fld id="{1C0AD01E-A0A1-4E9F-B5BB-6156A60EDB20}" type="slidenum">
+            <a:fld id="{2EB523E4-75F5-482A-806C-33BDBEB1ADC1}" type="slidenum">
               <a:rPr kumimoji="1" lang="ja-JP" altLang="en-US" smtClean="0"/>
               <a:t>‹#›</a:t>
             </a:fld>
@@ -336,7 +336,7 @@
     </p:spTree>
     <p:extLst>
       <p:ext uri="{BB962C8B-B14F-4D97-AF65-F5344CB8AC3E}">
-        <p14:creationId xmlns:p14="http://schemas.microsoft.com/office/powerpoint/2010/main" val="86683252"/>
+        <p14:creationId xmlns:p14="http://schemas.microsoft.com/office/powerpoint/2010/main" val="3554354510"/>
       </p:ext>
     </p:extLst>
   </p:cSld>
@@ -368,7 +368,7 @@
           <p:cNvPr id="2" name="タイトル 1">
             <a:extLst>
               <a:ext uri="{FF2B5EF4-FFF2-40B4-BE49-F238E27FC236}">
-                <a16:creationId xmlns:a16="http://schemas.microsoft.com/office/drawing/2014/main" id="{57C38639-3499-387F-4057-D1A8BA516BCD}"/>
+                <a16:creationId xmlns:a16="http://schemas.microsoft.com/office/drawing/2014/main" id="{36FEA38A-4429-8BF9-A8D9-9EBCC5CBEC4B}"/>
               </a:ext>
             </a:extLst>
           </p:cNvPr>
@@ -396,7 +396,7 @@
           <p:cNvPr id="3" name="縦書きテキスト プレースホルダー 2">
             <a:extLst>
               <a:ext uri="{FF2B5EF4-FFF2-40B4-BE49-F238E27FC236}">
-                <a16:creationId xmlns:a16="http://schemas.microsoft.com/office/drawing/2014/main" id="{0C88D691-BEDE-A376-B187-69E681F040C3}"/>
+                <a16:creationId xmlns:a16="http://schemas.microsoft.com/office/drawing/2014/main" id="{C96A09B7-2FF3-8EBB-D4F0-F7486AC000FF}"/>
               </a:ext>
             </a:extLst>
           </p:cNvPr>
@@ -485,7 +485,7 @@
           <p:cNvPr id="4" name="日付プレースホルダー 3">
             <a:extLst>
               <a:ext uri="{FF2B5EF4-FFF2-40B4-BE49-F238E27FC236}">
-                <a16:creationId xmlns:a16="http://schemas.microsoft.com/office/drawing/2014/main" id="{C8BBB68F-B49A-3950-DAEA-32DF34E2CB7B}"/>
+                <a16:creationId xmlns:a16="http://schemas.microsoft.com/office/drawing/2014/main" id="{6EE05DC2-5520-A20F-932F-B8510690BF79}"/>
               </a:ext>
             </a:extLst>
           </p:cNvPr>
@@ -501,7 +501,7 @@
           <a:bodyPr/>
           <a:lstStyle/>
           <a:p>
-            <a:fld id="{C606910E-A98E-481D-9CC4-C8B77A34EE55}" type="datetimeFigureOut">
+            <a:fld id="{F009DF12-3B71-43E6-B118-1E05C3EF7468}" type="datetimeFigureOut">
               <a:rPr kumimoji="1" lang="ja-JP" altLang="en-US" smtClean="0"/>
               <a:t>2026/9/20</a:t>
             </a:fld>
@@ -514,7 +514,7 @@
           <p:cNvPr id="5" name="フッター プレースホルダー 4">
             <a:extLst>
               <a:ext uri="{FF2B5EF4-FFF2-40B4-BE49-F238E27FC236}">
-                <a16:creationId xmlns:a16="http://schemas.microsoft.com/office/drawing/2014/main" id="{69FB7E3F-2DF0-34DC-E211-2291EFA6173D}"/>
+                <a16:creationId xmlns:a16="http://schemas.microsoft.com/office/drawing/2014/main" id="{E95F2B42-F198-8DA7-98B3-72725DB3BE81}"/>
               </a:ext>
             </a:extLst>
           </p:cNvPr>
@@ -539,7 +539,7 @@
           <p:cNvPr id="6" name="スライド番号プレースホルダー 5">
             <a:extLst>
               <a:ext uri="{FF2B5EF4-FFF2-40B4-BE49-F238E27FC236}">
-                <a16:creationId xmlns:a16="http://schemas.microsoft.com/office/drawing/2014/main" id="{2C4EFCF8-3525-FA35-DDF8-497CFFEC4706}"/>
+                <a16:creationId xmlns:a16="http://schemas.microsoft.com/office/drawing/2014/main" id="{9093813C-C926-342E-BF70-20464CBA9416}"/>
               </a:ext>
             </a:extLst>
           </p:cNvPr>
@@ -555,7 +555,7 @@
           <a:bodyPr/>
           <a:lstStyle/>
           <a:p>
-            <a:fld id="{1C0AD01E-A0A1-4E9F-B5BB-6156A60EDB20}" type="slidenum">
+            <a:fld id="{2EB523E4-75F5-482A-806C-33BDBEB1ADC1}" type="slidenum">
               <a:rPr kumimoji="1" lang="ja-JP" altLang="en-US" smtClean="0"/>
               <a:t>‹#›</a:t>
             </a:fld>
@@ -566,7 +566,7 @@
     </p:spTree>
     <p:extLst>
       <p:ext uri="{BB962C8B-B14F-4D97-AF65-F5344CB8AC3E}">
-        <p14:creationId xmlns:p14="http://schemas.microsoft.com/office/powerpoint/2010/main" val="4129475939"/>
+        <p14:creationId xmlns:p14="http://schemas.microsoft.com/office/powerpoint/2010/main" val="2330192526"/>
       </p:ext>
     </p:extLst>
   </p:cSld>
@@ -598,7 +598,7 @@
           <p:cNvPr id="2" name="縦書きタイトル 1">
             <a:extLst>
               <a:ext uri="{FF2B5EF4-FFF2-40B4-BE49-F238E27FC236}">
-                <a16:creationId xmlns:a16="http://schemas.microsoft.com/office/drawing/2014/main" id="{D48788E2-2EED-F831-D0CE-76BD44AC8522}"/>
+                <a16:creationId xmlns:a16="http://schemas.microsoft.com/office/drawing/2014/main" id="{5A6EA262-42C7-32F0-94AA-52457BD3FF71}"/>
               </a:ext>
             </a:extLst>
           </p:cNvPr>
@@ -631,7 +631,7 @@
           <p:cNvPr id="3" name="縦書きテキスト プレースホルダー 2">
             <a:extLst>
               <a:ext uri="{FF2B5EF4-FFF2-40B4-BE49-F238E27FC236}">
-                <a16:creationId xmlns:a16="http://schemas.microsoft.com/office/drawing/2014/main" id="{0E4D332C-0E59-2DB9-1B62-D43F0369C006}"/>
+                <a16:creationId xmlns:a16="http://schemas.microsoft.com/office/drawing/2014/main" id="{E7E4575B-CCD8-7460-FEE1-2D14C91FA85D}"/>
               </a:ext>
             </a:extLst>
           </p:cNvPr>
@@ -725,7 +725,7 @@
           <p:cNvPr id="4" name="日付プレースホルダー 3">
             <a:extLst>
               <a:ext uri="{FF2B5EF4-FFF2-40B4-BE49-F238E27FC236}">
-                <a16:creationId xmlns:a16="http://schemas.microsoft.com/office/drawing/2014/main" id="{3EDC5BBF-5004-0FD2-2BBA-2738EC3FAE18}"/>
+                <a16:creationId xmlns:a16="http://schemas.microsoft.com/office/drawing/2014/main" id="{F479A0B3-0671-BB53-A15A-F5B05A2DA534}"/>
               </a:ext>
             </a:extLst>
           </p:cNvPr>
@@ -741,7 +741,7 @@
           <a:bodyPr/>
           <a:lstStyle/>
           <a:p>
-            <a:fld id="{C606910E-A98E-481D-9CC4-C8B77A34EE55}" type="datetimeFigureOut">
+            <a:fld id="{F009DF12-3B71-43E6-B118-1E05C3EF7468}" type="datetimeFigureOut">
               <a:rPr kumimoji="1" lang="ja-JP" altLang="en-US" smtClean="0"/>
               <a:t>2026/9/20</a:t>
             </a:fld>
@@ -754,7 +754,7 @@
           <p:cNvPr id="5" name="フッター プレースホルダー 4">
             <a:extLst>
               <a:ext uri="{FF2B5EF4-FFF2-40B4-BE49-F238E27FC236}">
-                <a16:creationId xmlns:a16="http://schemas.microsoft.com/office/drawing/2014/main" id="{1F3D68D8-F06B-7B94-0333-88CDE6C4C2E8}"/>
+                <a16:creationId xmlns:a16="http://schemas.microsoft.com/office/drawing/2014/main" id="{E5182871-922A-45A0-9312-EB23F6AB917A}"/>
               </a:ext>
             </a:extLst>
           </p:cNvPr>
@@ -779,7 +779,7 @@
           <p:cNvPr id="6" name="スライド番号プレースホルダー 5">
             <a:extLst>
               <a:ext uri="{FF2B5EF4-FFF2-40B4-BE49-F238E27FC236}">
-                <a16:creationId xmlns:a16="http://schemas.microsoft.com/office/drawing/2014/main" id="{C9005422-228D-68C1-CC62-8D3F67F3D88E}"/>
+                <a16:creationId xmlns:a16="http://schemas.microsoft.com/office/drawing/2014/main" id="{26F08B3F-2148-D399-0769-A3EF102A157D}"/>
               </a:ext>
             </a:extLst>
           </p:cNvPr>
@@ -795,7 +795,7 @@
           <a:bodyPr/>
           <a:lstStyle/>
           <a:p>
-            <a:fld id="{1C0AD01E-A0A1-4E9F-B5BB-6156A60EDB20}" type="slidenum">
+            <a:fld id="{2EB523E4-75F5-482A-806C-33BDBEB1ADC1}" type="slidenum">
               <a:rPr kumimoji="1" lang="ja-JP" altLang="en-US" smtClean="0"/>
               <a:t>‹#›</a:t>
             </a:fld>
@@ -806,7 +806,7 @@
     </p:spTree>
     <p:extLst>
       <p:ext uri="{BB962C8B-B14F-4D97-AF65-F5344CB8AC3E}">
-        <p14:creationId xmlns:p14="http://schemas.microsoft.com/office/powerpoint/2010/main" val="2991021147"/>
+        <p14:creationId xmlns:p14="http://schemas.microsoft.com/office/powerpoint/2010/main" val="4141820986"/>
       </p:ext>
     </p:extLst>
   </p:cSld>
@@ -838,7 +838,7 @@
           <p:cNvPr id="2" name="タイトル 1">
             <a:extLst>
               <a:ext uri="{FF2B5EF4-FFF2-40B4-BE49-F238E27FC236}">
-                <a16:creationId xmlns:a16="http://schemas.microsoft.com/office/drawing/2014/main" id="{04AD4307-652E-5861-C442-4B01AACED90F}"/>
+                <a16:creationId xmlns:a16="http://schemas.microsoft.com/office/drawing/2014/main" id="{F5770FC5-425C-9FCF-3C16-1F2A29F1B80A}"/>
               </a:ext>
             </a:extLst>
           </p:cNvPr>
@@ -866,7 +866,7 @@
           <p:cNvPr id="3" name="コンテンツ プレースホルダー 2">
             <a:extLst>
               <a:ext uri="{FF2B5EF4-FFF2-40B4-BE49-F238E27FC236}">
-                <a16:creationId xmlns:a16="http://schemas.microsoft.com/office/drawing/2014/main" id="{0B23C4F4-CEBE-102E-3ABA-DBBD1DA64C40}"/>
+                <a16:creationId xmlns:a16="http://schemas.microsoft.com/office/drawing/2014/main" id="{4B997CBF-9667-2755-3950-2753E8523010}"/>
               </a:ext>
             </a:extLst>
           </p:cNvPr>
@@ -955,7 +955,7 @@
           <p:cNvPr id="4" name="日付プレースホルダー 3">
             <a:extLst>
               <a:ext uri="{FF2B5EF4-FFF2-40B4-BE49-F238E27FC236}">
-                <a16:creationId xmlns:a16="http://schemas.microsoft.com/office/drawing/2014/main" id="{4E1FA653-6806-99D2-6943-D9AEADCB97EC}"/>
+                <a16:creationId xmlns:a16="http://schemas.microsoft.com/office/drawing/2014/main" id="{DC94B300-D7BF-B928-6E2D-20AAB813F0FA}"/>
               </a:ext>
             </a:extLst>
           </p:cNvPr>
@@ -971,7 +971,7 @@
           <a:bodyPr/>
           <a:lstStyle/>
           <a:p>
-            <a:fld id="{C606910E-A98E-481D-9CC4-C8B77A34EE55}" type="datetimeFigureOut">
+            <a:fld id="{F009DF12-3B71-43E6-B118-1E05C3EF7468}" type="datetimeFigureOut">
               <a:rPr kumimoji="1" lang="ja-JP" altLang="en-US" smtClean="0"/>
               <a:t>2026/9/20</a:t>
             </a:fld>
@@ -984,7 +984,7 @@
           <p:cNvPr id="5" name="フッター プレースホルダー 4">
             <a:extLst>
               <a:ext uri="{FF2B5EF4-FFF2-40B4-BE49-F238E27FC236}">
-                <a16:creationId xmlns:a16="http://schemas.microsoft.com/office/drawing/2014/main" id="{59463495-EBBC-78A9-9EAC-DE240062C0D0}"/>
+                <a16:creationId xmlns:a16="http://schemas.microsoft.com/office/drawing/2014/main" id="{96AC5102-BB2C-3529-51F1-FB3A4E805844}"/>
               </a:ext>
             </a:extLst>
           </p:cNvPr>
@@ -1009,7 +1009,7 @@
           <p:cNvPr id="6" name="スライド番号プレースホルダー 5">
             <a:extLst>
               <a:ext uri="{FF2B5EF4-FFF2-40B4-BE49-F238E27FC236}">
-                <a16:creationId xmlns:a16="http://schemas.microsoft.com/office/drawing/2014/main" id="{29A84B35-0B68-9E8A-3B32-F9403F617A02}"/>
+                <a16:creationId xmlns:a16="http://schemas.microsoft.com/office/drawing/2014/main" id="{3AE00D46-4E09-F7BD-9A6B-C2BB8B6121F9}"/>
               </a:ext>
             </a:extLst>
           </p:cNvPr>
@@ -1025,7 +1025,7 @@
           <a:bodyPr/>
           <a:lstStyle/>
           <a:p>
-            <a:fld id="{1C0AD01E-A0A1-4E9F-B5BB-6156A60EDB20}" type="slidenum">
+            <a:fld id="{2EB523E4-75F5-482A-806C-33BDBEB1ADC1}" type="slidenum">
               <a:rPr kumimoji="1" lang="ja-JP" altLang="en-US" smtClean="0"/>
               <a:t>‹#›</a:t>
             </a:fld>
@@ -1036,7 +1036,7 @@
     </p:spTree>
     <p:extLst>
       <p:ext uri="{BB962C8B-B14F-4D97-AF65-F5344CB8AC3E}">
-        <p14:creationId xmlns:p14="http://schemas.microsoft.com/office/powerpoint/2010/main" val="2825648608"/>
+        <p14:creationId xmlns:p14="http://schemas.microsoft.com/office/powerpoint/2010/main" val="132374865"/>
       </p:ext>
     </p:extLst>
   </p:cSld>
@@ -1068,7 +1068,7 @@
           <p:cNvPr id="2" name="タイトル 1">
             <a:extLst>
               <a:ext uri="{FF2B5EF4-FFF2-40B4-BE49-F238E27FC236}">
-                <a16:creationId xmlns:a16="http://schemas.microsoft.com/office/drawing/2014/main" id="{9DA6EE8F-2864-B109-3AF0-5F21338B8F53}"/>
+                <a16:creationId xmlns:a16="http://schemas.microsoft.com/office/drawing/2014/main" id="{92C48437-D64B-67B8-0F75-71F663CF30C7}"/>
               </a:ext>
             </a:extLst>
           </p:cNvPr>
@@ -1105,7 +1105,7 @@
           <p:cNvPr id="3" name="テキスト プレースホルダー 2">
             <a:extLst>
               <a:ext uri="{FF2B5EF4-FFF2-40B4-BE49-F238E27FC236}">
-                <a16:creationId xmlns:a16="http://schemas.microsoft.com/office/drawing/2014/main" id="{AC7CE620-78A6-CE71-E138-83E0E0BE9707}"/>
+                <a16:creationId xmlns:a16="http://schemas.microsoft.com/office/drawing/2014/main" id="{040E5B49-014F-E53B-B6B7-0774AF02B158}"/>
               </a:ext>
             </a:extLst>
           </p:cNvPr>
@@ -1230,7 +1230,7 @@
           <p:cNvPr id="4" name="日付プレースホルダー 3">
             <a:extLst>
               <a:ext uri="{FF2B5EF4-FFF2-40B4-BE49-F238E27FC236}">
-                <a16:creationId xmlns:a16="http://schemas.microsoft.com/office/drawing/2014/main" id="{D500BA38-6D2B-C5A6-D77B-ADA770CF917C}"/>
+                <a16:creationId xmlns:a16="http://schemas.microsoft.com/office/drawing/2014/main" id="{5C3413E3-9C63-6910-4399-01F8F3076A07}"/>
               </a:ext>
             </a:extLst>
           </p:cNvPr>
@@ -1246,7 +1246,7 @@
           <a:bodyPr/>
           <a:lstStyle/>
           <a:p>
-            <a:fld id="{C606910E-A98E-481D-9CC4-C8B77A34EE55}" type="datetimeFigureOut">
+            <a:fld id="{F009DF12-3B71-43E6-B118-1E05C3EF7468}" type="datetimeFigureOut">
               <a:rPr kumimoji="1" lang="ja-JP" altLang="en-US" smtClean="0"/>
               <a:t>2026/9/20</a:t>
             </a:fld>
@@ -1259,7 +1259,7 @@
           <p:cNvPr id="5" name="フッター プレースホルダー 4">
             <a:extLst>
               <a:ext uri="{FF2B5EF4-FFF2-40B4-BE49-F238E27FC236}">
-                <a16:creationId xmlns:a16="http://schemas.microsoft.com/office/drawing/2014/main" id="{9A97DE57-EFB2-555E-A8DE-FF0D717DD081}"/>
+                <a16:creationId xmlns:a16="http://schemas.microsoft.com/office/drawing/2014/main" id="{AC0578D2-B700-1999-4305-2F9CDEBC5C40}"/>
               </a:ext>
             </a:extLst>
           </p:cNvPr>
@@ -1284,7 +1284,7 @@
           <p:cNvPr id="6" name="スライド番号プレースホルダー 5">
             <a:extLst>
               <a:ext uri="{FF2B5EF4-FFF2-40B4-BE49-F238E27FC236}">
-                <a16:creationId xmlns:a16="http://schemas.microsoft.com/office/drawing/2014/main" id="{FA4F0284-546B-CA58-5396-E484BD3CF300}"/>
+                <a16:creationId xmlns:a16="http://schemas.microsoft.com/office/drawing/2014/main" id="{40A52B6C-0CD3-4D11-2394-BE0885F1470B}"/>
               </a:ext>
             </a:extLst>
           </p:cNvPr>
@@ -1300,7 +1300,7 @@
           <a:bodyPr/>
           <a:lstStyle/>
           <a:p>
-            <a:fld id="{1C0AD01E-A0A1-4E9F-B5BB-6156A60EDB20}" type="slidenum">
+            <a:fld id="{2EB523E4-75F5-482A-806C-33BDBEB1ADC1}" type="slidenum">
               <a:rPr kumimoji="1" lang="ja-JP" altLang="en-US" smtClean="0"/>
               <a:t>‹#›</a:t>
             </a:fld>
@@ -1311,7 +1311,7 @@
     </p:spTree>
     <p:extLst>
       <p:ext uri="{BB962C8B-B14F-4D97-AF65-F5344CB8AC3E}">
-        <p14:creationId xmlns:p14="http://schemas.microsoft.com/office/powerpoint/2010/main" val="125082551"/>
+        <p14:creationId xmlns:p14="http://schemas.microsoft.com/office/powerpoint/2010/main" val="2504414402"/>
       </p:ext>
     </p:extLst>
   </p:cSld>
@@ -1343,7 +1343,7 @@
           <p:cNvPr id="2" name="タイトル 1">
             <a:extLst>
               <a:ext uri="{FF2B5EF4-FFF2-40B4-BE49-F238E27FC236}">
-                <a16:creationId xmlns:a16="http://schemas.microsoft.com/office/drawing/2014/main" id="{CFE1E873-11F9-E522-5DC2-78AFFB9D1EFC}"/>
+                <a16:creationId xmlns:a16="http://schemas.microsoft.com/office/drawing/2014/main" id="{894FDDC2-00F4-100E-EB1B-8E380488FCBF}"/>
               </a:ext>
             </a:extLst>
           </p:cNvPr>
@@ -1371,7 +1371,7 @@
           <p:cNvPr id="3" name="コンテンツ プレースホルダー 2">
             <a:extLst>
               <a:ext uri="{FF2B5EF4-FFF2-40B4-BE49-F238E27FC236}">
-                <a16:creationId xmlns:a16="http://schemas.microsoft.com/office/drawing/2014/main" id="{3B7DCC73-1737-D0F0-319E-F64936013AB5}"/>
+                <a16:creationId xmlns:a16="http://schemas.microsoft.com/office/drawing/2014/main" id="{4D21831E-FA17-037B-5525-7199DB43473B}"/>
               </a:ext>
             </a:extLst>
           </p:cNvPr>
@@ -1465,7 +1465,7 @@
           <p:cNvPr id="4" name="コンテンツ プレースホルダー 3">
             <a:extLst>
               <a:ext uri="{FF2B5EF4-FFF2-40B4-BE49-F238E27FC236}">
-                <a16:creationId xmlns:a16="http://schemas.microsoft.com/office/drawing/2014/main" id="{EE9688E7-3D80-8B7D-B87B-0E0A40BF3778}"/>
+                <a16:creationId xmlns:a16="http://schemas.microsoft.com/office/drawing/2014/main" id="{04DF37BB-46B7-DE96-6F7C-23CD2A84717E}"/>
               </a:ext>
             </a:extLst>
           </p:cNvPr>
@@ -1559,7 +1559,7 @@
           <p:cNvPr id="5" name="日付プレースホルダー 4">
             <a:extLst>
               <a:ext uri="{FF2B5EF4-FFF2-40B4-BE49-F238E27FC236}">
-                <a16:creationId xmlns:a16="http://schemas.microsoft.com/office/drawing/2014/main" id="{821879DE-D56F-18AA-BE9B-834F21283A88}"/>
+                <a16:creationId xmlns:a16="http://schemas.microsoft.com/office/drawing/2014/main" id="{D631AFF9-72B1-6720-C0D1-513317409930}"/>
               </a:ext>
             </a:extLst>
           </p:cNvPr>
@@ -1575,7 +1575,7 @@
           <a:bodyPr/>
           <a:lstStyle/>
           <a:p>
-            <a:fld id="{C606910E-A98E-481D-9CC4-C8B77A34EE55}" type="datetimeFigureOut">
+            <a:fld id="{F009DF12-3B71-43E6-B118-1E05C3EF7468}" type="datetimeFigureOut">
               <a:rPr kumimoji="1" lang="ja-JP" altLang="en-US" smtClean="0"/>
               <a:t>2026/9/20</a:t>
             </a:fld>
@@ -1588,7 +1588,7 @@
           <p:cNvPr id="6" name="フッター プレースホルダー 5">
             <a:extLst>
               <a:ext uri="{FF2B5EF4-FFF2-40B4-BE49-F238E27FC236}">
-                <a16:creationId xmlns:a16="http://schemas.microsoft.com/office/drawing/2014/main" id="{5E41FC1A-FCB1-180C-0B44-7B651CDCD99D}"/>
+                <a16:creationId xmlns:a16="http://schemas.microsoft.com/office/drawing/2014/main" id="{52912E24-F3C2-1047-C44E-5C75A2072556}"/>
               </a:ext>
             </a:extLst>
           </p:cNvPr>
@@ -1613,7 +1613,7 @@
           <p:cNvPr id="7" name="スライド番号プレースホルダー 6">
             <a:extLst>
               <a:ext uri="{FF2B5EF4-FFF2-40B4-BE49-F238E27FC236}">
-                <a16:creationId xmlns:a16="http://schemas.microsoft.com/office/drawing/2014/main" id="{AB0CBAE2-0957-0F27-6A07-F9E0A4FBF9B2}"/>
+                <a16:creationId xmlns:a16="http://schemas.microsoft.com/office/drawing/2014/main" id="{0AA58C3B-9ABF-DDDD-893B-8EB2B7527175}"/>
               </a:ext>
             </a:extLst>
           </p:cNvPr>
@@ -1629,7 +1629,7 @@
           <a:bodyPr/>
           <a:lstStyle/>
           <a:p>
-            <a:fld id="{1C0AD01E-A0A1-4E9F-B5BB-6156A60EDB20}" type="slidenum">
+            <a:fld id="{2EB523E4-75F5-482A-806C-33BDBEB1ADC1}" type="slidenum">
               <a:rPr kumimoji="1" lang="ja-JP" altLang="en-US" smtClean="0"/>
               <a:t>‹#›</a:t>
             </a:fld>
@@ -1640,7 +1640,7 @@
     </p:spTree>
     <p:extLst>
       <p:ext uri="{BB962C8B-B14F-4D97-AF65-F5344CB8AC3E}">
-        <p14:creationId xmlns:p14="http://schemas.microsoft.com/office/powerpoint/2010/main" val="9477643"/>
+        <p14:creationId xmlns:p14="http://schemas.microsoft.com/office/powerpoint/2010/main" val="1314820067"/>
       </p:ext>
     </p:extLst>
   </p:cSld>
@@ -1672,7 +1672,7 @@
           <p:cNvPr id="2" name="タイトル 1">
             <a:extLst>
               <a:ext uri="{FF2B5EF4-FFF2-40B4-BE49-F238E27FC236}">
-                <a16:creationId xmlns:a16="http://schemas.microsoft.com/office/drawing/2014/main" id="{417E1A21-CC84-FBE6-0740-CBEBFBC037DD}"/>
+                <a16:creationId xmlns:a16="http://schemas.microsoft.com/office/drawing/2014/main" id="{C7B6214C-88BA-D214-5917-37ED28F5EC99}"/>
               </a:ext>
             </a:extLst>
           </p:cNvPr>
@@ -1705,7 +1705,7 @@
           <p:cNvPr id="3" name="テキスト プレースホルダー 2">
             <a:extLst>
               <a:ext uri="{FF2B5EF4-FFF2-40B4-BE49-F238E27FC236}">
-                <a16:creationId xmlns:a16="http://schemas.microsoft.com/office/drawing/2014/main" id="{ADCB1C2F-C6AB-48F9-E7B1-FB5FB7F5CD65}"/>
+                <a16:creationId xmlns:a16="http://schemas.microsoft.com/office/drawing/2014/main" id="{AFDFD165-B2A4-A7A0-C7A1-55D3C9B9B042}"/>
               </a:ext>
             </a:extLst>
           </p:cNvPr>
@@ -1776,7 +1776,7 @@
           <p:cNvPr id="4" name="コンテンツ プレースホルダー 3">
             <a:extLst>
               <a:ext uri="{FF2B5EF4-FFF2-40B4-BE49-F238E27FC236}">
-                <a16:creationId xmlns:a16="http://schemas.microsoft.com/office/drawing/2014/main" id="{AF78A42D-F185-170D-27E6-DA69049A7DF3}"/>
+                <a16:creationId xmlns:a16="http://schemas.microsoft.com/office/drawing/2014/main" id="{3CEED082-0016-5997-0B12-7F1B8B8B3EBE}"/>
               </a:ext>
             </a:extLst>
           </p:cNvPr>
@@ -1870,7 +1870,7 @@
           <p:cNvPr id="5" name="テキスト プレースホルダー 4">
             <a:extLst>
               <a:ext uri="{FF2B5EF4-FFF2-40B4-BE49-F238E27FC236}">
-                <a16:creationId xmlns:a16="http://schemas.microsoft.com/office/drawing/2014/main" id="{4439BF1F-3CFE-12F0-F1AB-41CEF21A6B5D}"/>
+                <a16:creationId xmlns:a16="http://schemas.microsoft.com/office/drawing/2014/main" id="{E21B7959-5C72-DBF9-AFF9-02CBF0013A4E}"/>
               </a:ext>
             </a:extLst>
           </p:cNvPr>
@@ -1941,7 +1941,7 @@
           <p:cNvPr id="6" name="コンテンツ プレースホルダー 5">
             <a:extLst>
               <a:ext uri="{FF2B5EF4-FFF2-40B4-BE49-F238E27FC236}">
-                <a16:creationId xmlns:a16="http://schemas.microsoft.com/office/drawing/2014/main" id="{A1AB71E8-EE65-ED6B-17BB-C3D1F5142161}"/>
+                <a16:creationId xmlns:a16="http://schemas.microsoft.com/office/drawing/2014/main" id="{FC169685-3CDB-0105-8B19-384A61CDC255}"/>
               </a:ext>
             </a:extLst>
           </p:cNvPr>
@@ -2035,7 +2035,7 @@
           <p:cNvPr id="7" name="日付プレースホルダー 6">
             <a:extLst>
               <a:ext uri="{FF2B5EF4-FFF2-40B4-BE49-F238E27FC236}">
-                <a16:creationId xmlns:a16="http://schemas.microsoft.com/office/drawing/2014/main" id="{C3D6C9BF-86BD-4CAB-FF5B-2A1CDA03533A}"/>
+                <a16:creationId xmlns:a16="http://schemas.microsoft.com/office/drawing/2014/main" id="{EBF7878C-F143-0F0F-8C8B-70260B7C65C2}"/>
               </a:ext>
             </a:extLst>
           </p:cNvPr>
@@ -2051,7 +2051,7 @@
           <a:bodyPr/>
           <a:lstStyle/>
           <a:p>
-            <a:fld id="{C606910E-A98E-481D-9CC4-C8B77A34EE55}" type="datetimeFigureOut">
+            <a:fld id="{F009DF12-3B71-43E6-B118-1E05C3EF7468}" type="datetimeFigureOut">
               <a:rPr kumimoji="1" lang="ja-JP" altLang="en-US" smtClean="0"/>
               <a:t>2026/9/20</a:t>
             </a:fld>
@@ -2064,7 +2064,7 @@
           <p:cNvPr id="8" name="フッター プレースホルダー 7">
             <a:extLst>
               <a:ext uri="{FF2B5EF4-FFF2-40B4-BE49-F238E27FC236}">
-                <a16:creationId xmlns:a16="http://schemas.microsoft.com/office/drawing/2014/main" id="{FECB6B9C-4737-93FD-CC8A-493CA5450C13}"/>
+                <a16:creationId xmlns:a16="http://schemas.microsoft.com/office/drawing/2014/main" id="{B0AE688F-AA13-27C5-CF4E-F098C9E5C3AC}"/>
               </a:ext>
             </a:extLst>
           </p:cNvPr>
@@ -2089,7 +2089,7 @@
           <p:cNvPr id="9" name="スライド番号プレースホルダー 8">
             <a:extLst>
               <a:ext uri="{FF2B5EF4-FFF2-40B4-BE49-F238E27FC236}">
-                <a16:creationId xmlns:a16="http://schemas.microsoft.com/office/drawing/2014/main" id="{4F60FFB7-B47C-0BB4-F11F-9EDEC87865F4}"/>
+                <a16:creationId xmlns:a16="http://schemas.microsoft.com/office/drawing/2014/main" id="{8CA10B51-B9C4-5734-2926-E71B1722E6B3}"/>
               </a:ext>
             </a:extLst>
           </p:cNvPr>
@@ -2105,7 +2105,7 @@
           <a:bodyPr/>
           <a:lstStyle/>
           <a:p>
-            <a:fld id="{1C0AD01E-A0A1-4E9F-B5BB-6156A60EDB20}" type="slidenum">
+            <a:fld id="{2EB523E4-75F5-482A-806C-33BDBEB1ADC1}" type="slidenum">
               <a:rPr kumimoji="1" lang="ja-JP" altLang="en-US" smtClean="0"/>
               <a:t>‹#›</a:t>
             </a:fld>
@@ -2116,7 +2116,7 @@
     </p:spTree>
     <p:extLst>
       <p:ext uri="{BB962C8B-B14F-4D97-AF65-F5344CB8AC3E}">
-        <p14:creationId xmlns:p14="http://schemas.microsoft.com/office/powerpoint/2010/main" val="230818691"/>
+        <p14:creationId xmlns:p14="http://schemas.microsoft.com/office/powerpoint/2010/main" val="2639938858"/>
       </p:ext>
     </p:extLst>
   </p:cSld>
@@ -2148,7 +2148,7 @@
           <p:cNvPr id="2" name="タイトル 1">
             <a:extLst>
               <a:ext uri="{FF2B5EF4-FFF2-40B4-BE49-F238E27FC236}">
-                <a16:creationId xmlns:a16="http://schemas.microsoft.com/office/drawing/2014/main" id="{7D7F7C9C-D004-8B2C-73BB-50EDAB1AE18C}"/>
+                <a16:creationId xmlns:a16="http://schemas.microsoft.com/office/drawing/2014/main" id="{2A5DF002-A00F-0891-9EB2-0658A6E5B8A5}"/>
               </a:ext>
             </a:extLst>
           </p:cNvPr>
@@ -2176,7 +2176,7 @@
           <p:cNvPr id="3" name="日付プレースホルダー 2">
             <a:extLst>
               <a:ext uri="{FF2B5EF4-FFF2-40B4-BE49-F238E27FC236}">
-                <a16:creationId xmlns:a16="http://schemas.microsoft.com/office/drawing/2014/main" id="{DD72CC11-A24B-BAC7-0701-CF438765414F}"/>
+                <a16:creationId xmlns:a16="http://schemas.microsoft.com/office/drawing/2014/main" id="{B2DA8891-A536-7B79-2C44-98C2D8DB338B}"/>
               </a:ext>
             </a:extLst>
           </p:cNvPr>
@@ -2192,7 +2192,7 @@
           <a:bodyPr/>
           <a:lstStyle/>
           <a:p>
-            <a:fld id="{C606910E-A98E-481D-9CC4-C8B77A34EE55}" type="datetimeFigureOut">
+            <a:fld id="{F009DF12-3B71-43E6-B118-1E05C3EF7468}" type="datetimeFigureOut">
               <a:rPr kumimoji="1" lang="ja-JP" altLang="en-US" smtClean="0"/>
               <a:t>2026/9/20</a:t>
             </a:fld>
@@ -2205,7 +2205,7 @@
           <p:cNvPr id="4" name="フッター プレースホルダー 3">
             <a:extLst>
               <a:ext uri="{FF2B5EF4-FFF2-40B4-BE49-F238E27FC236}">
-                <a16:creationId xmlns:a16="http://schemas.microsoft.com/office/drawing/2014/main" id="{E8827AA6-06DD-80EB-4CC5-7BE8B72DA9CE}"/>
+                <a16:creationId xmlns:a16="http://schemas.microsoft.com/office/drawing/2014/main" id="{825C5D54-678D-C148-FB6D-2517232911FF}"/>
               </a:ext>
             </a:extLst>
           </p:cNvPr>
@@ -2230,7 +2230,7 @@
           <p:cNvPr id="5" name="スライド番号プレースホルダー 4">
             <a:extLst>
               <a:ext uri="{FF2B5EF4-FFF2-40B4-BE49-F238E27FC236}">
-                <a16:creationId xmlns:a16="http://schemas.microsoft.com/office/drawing/2014/main" id="{AAD1F697-8B03-EBFA-0285-75B73FFEF02F}"/>
+                <a16:creationId xmlns:a16="http://schemas.microsoft.com/office/drawing/2014/main" id="{69E28D22-0DA7-D9EC-ECA2-D22CCF7647EA}"/>
               </a:ext>
             </a:extLst>
           </p:cNvPr>
@@ -2246,7 +2246,7 @@
           <a:bodyPr/>
           <a:lstStyle/>
           <a:p>
-            <a:fld id="{1C0AD01E-A0A1-4E9F-B5BB-6156A60EDB20}" type="slidenum">
+            <a:fld id="{2EB523E4-75F5-482A-806C-33BDBEB1ADC1}" type="slidenum">
               <a:rPr kumimoji="1" lang="ja-JP" altLang="en-US" smtClean="0"/>
               <a:t>‹#›</a:t>
             </a:fld>
@@ -2257,7 +2257,7 @@
     </p:spTree>
     <p:extLst>
       <p:ext uri="{BB962C8B-B14F-4D97-AF65-F5344CB8AC3E}">
-        <p14:creationId xmlns:p14="http://schemas.microsoft.com/office/powerpoint/2010/main" val="2601916722"/>
+        <p14:creationId xmlns:p14="http://schemas.microsoft.com/office/powerpoint/2010/main" val="901387884"/>
       </p:ext>
     </p:extLst>
   </p:cSld>
@@ -2289,7 +2289,7 @@
           <p:cNvPr id="2" name="日付プレースホルダー 1">
             <a:extLst>
               <a:ext uri="{FF2B5EF4-FFF2-40B4-BE49-F238E27FC236}">
-                <a16:creationId xmlns:a16="http://schemas.microsoft.com/office/drawing/2014/main" id="{20A0616C-BA3B-0336-2E2D-27795255DA1F}"/>
+                <a16:creationId xmlns:a16="http://schemas.microsoft.com/office/drawing/2014/main" id="{E937627D-6822-FD05-4620-8C8AB8716C46}"/>
               </a:ext>
             </a:extLst>
           </p:cNvPr>
@@ -2305,7 +2305,7 @@
           <a:bodyPr/>
           <a:lstStyle/>
           <a:p>
-            <a:fld id="{C606910E-A98E-481D-9CC4-C8B77A34EE55}" type="datetimeFigureOut">
+            <a:fld id="{F009DF12-3B71-43E6-B118-1E05C3EF7468}" type="datetimeFigureOut">
               <a:rPr kumimoji="1" lang="ja-JP" altLang="en-US" smtClean="0"/>
               <a:t>2026/9/20</a:t>
             </a:fld>
@@ -2318,7 +2318,7 @@
           <p:cNvPr id="3" name="フッター プレースホルダー 2">
             <a:extLst>
               <a:ext uri="{FF2B5EF4-FFF2-40B4-BE49-F238E27FC236}">
-                <a16:creationId xmlns:a16="http://schemas.microsoft.com/office/drawing/2014/main" id="{261319DE-33BB-DCF3-E4E3-E8C3B0F65E24}"/>
+                <a16:creationId xmlns:a16="http://schemas.microsoft.com/office/drawing/2014/main" id="{931A93CE-19D5-96D0-0299-E59AC92F3028}"/>
               </a:ext>
             </a:extLst>
           </p:cNvPr>
@@ -2343,7 +2343,7 @@
           <p:cNvPr id="4" name="スライド番号プレースホルダー 3">
             <a:extLst>
               <a:ext uri="{FF2B5EF4-FFF2-40B4-BE49-F238E27FC236}">
-                <a16:creationId xmlns:a16="http://schemas.microsoft.com/office/drawing/2014/main" id="{5E21D04D-81B4-FA1C-0339-F9D43A736B66}"/>
+                <a16:creationId xmlns:a16="http://schemas.microsoft.com/office/drawing/2014/main" id="{DA6A5471-655D-1FAD-A0F3-813FD76EA3DC}"/>
               </a:ext>
             </a:extLst>
           </p:cNvPr>
@@ -2359,7 +2359,7 @@
           <a:bodyPr/>
           <a:lstStyle/>
           <a:p>
-            <a:fld id="{1C0AD01E-A0A1-4E9F-B5BB-6156A60EDB20}" type="slidenum">
+            <a:fld id="{2EB523E4-75F5-482A-806C-33BDBEB1ADC1}" type="slidenum">
               <a:rPr kumimoji="1" lang="ja-JP" altLang="en-US" smtClean="0"/>
               <a:t>‹#›</a:t>
             </a:fld>
@@ -2370,7 +2370,7 @@
     </p:spTree>
     <p:extLst>
       <p:ext uri="{BB962C8B-B14F-4D97-AF65-F5344CB8AC3E}">
-        <p14:creationId xmlns:p14="http://schemas.microsoft.com/office/powerpoint/2010/main" val="4264971246"/>
+        <p14:creationId xmlns:p14="http://schemas.microsoft.com/office/powerpoint/2010/main" val="937470429"/>
       </p:ext>
     </p:extLst>
   </p:cSld>
@@ -2402,7 +2402,7 @@
           <p:cNvPr id="2" name="タイトル 1">
             <a:extLst>
               <a:ext uri="{FF2B5EF4-FFF2-40B4-BE49-F238E27FC236}">
-                <a16:creationId xmlns:a16="http://schemas.microsoft.com/office/drawing/2014/main" id="{438C74A8-2350-1FAA-F0CC-071C7F25EB05}"/>
+                <a16:creationId xmlns:a16="http://schemas.microsoft.com/office/drawing/2014/main" id="{5C5186AD-AC03-3180-C97D-E1758E1855DA}"/>
               </a:ext>
             </a:extLst>
           </p:cNvPr>
@@ -2439,7 +2439,7 @@
           <p:cNvPr id="3" name="コンテンツ プレースホルダー 2">
             <a:extLst>
               <a:ext uri="{FF2B5EF4-FFF2-40B4-BE49-F238E27FC236}">
-                <a16:creationId xmlns:a16="http://schemas.microsoft.com/office/drawing/2014/main" id="{FF8FAB6F-2CF7-E754-ADD7-D197C2537B92}"/>
+                <a16:creationId xmlns:a16="http://schemas.microsoft.com/office/drawing/2014/main" id="{116139F1-84E6-49C5-3FBF-DBF276AFBE67}"/>
               </a:ext>
             </a:extLst>
           </p:cNvPr>
@@ -2561,7 +2561,7 @@
           <p:cNvPr id="4" name="テキスト プレースホルダー 3">
             <a:extLst>
               <a:ext uri="{FF2B5EF4-FFF2-40B4-BE49-F238E27FC236}">
-                <a16:creationId xmlns:a16="http://schemas.microsoft.com/office/drawing/2014/main" id="{DA4E2168-A0AA-D79A-472C-9EEE6262CCB5}"/>
+                <a16:creationId xmlns:a16="http://schemas.microsoft.com/office/drawing/2014/main" id="{DC9AA663-DFD3-815C-9FF0-8CDB7A141E8B}"/>
               </a:ext>
             </a:extLst>
           </p:cNvPr>
@@ -2632,7 +2632,7 @@
           <p:cNvPr id="5" name="日付プレースホルダー 4">
             <a:extLst>
               <a:ext uri="{FF2B5EF4-FFF2-40B4-BE49-F238E27FC236}">
-                <a16:creationId xmlns:a16="http://schemas.microsoft.com/office/drawing/2014/main" id="{79CDC9F6-E579-61AE-B417-AFBDFBD7637D}"/>
+                <a16:creationId xmlns:a16="http://schemas.microsoft.com/office/drawing/2014/main" id="{BE427A95-9DB8-08DE-4968-11E380A629FF}"/>
               </a:ext>
             </a:extLst>
           </p:cNvPr>
@@ -2648,7 +2648,7 @@
           <a:bodyPr/>
           <a:lstStyle/>
           <a:p>
-            <a:fld id="{C606910E-A98E-481D-9CC4-C8B77A34EE55}" type="datetimeFigureOut">
+            <a:fld id="{F009DF12-3B71-43E6-B118-1E05C3EF7468}" type="datetimeFigureOut">
               <a:rPr kumimoji="1" lang="ja-JP" altLang="en-US" smtClean="0"/>
               <a:t>2026/9/20</a:t>
             </a:fld>
@@ -2661,7 +2661,7 @@
           <p:cNvPr id="6" name="フッター プレースホルダー 5">
             <a:extLst>
               <a:ext uri="{FF2B5EF4-FFF2-40B4-BE49-F238E27FC236}">
-                <a16:creationId xmlns:a16="http://schemas.microsoft.com/office/drawing/2014/main" id="{89AF6185-6F76-C602-0753-C8FE7532A775}"/>
+                <a16:creationId xmlns:a16="http://schemas.microsoft.com/office/drawing/2014/main" id="{27E050EF-3D3F-3FC9-E207-A777C2C9882D}"/>
               </a:ext>
             </a:extLst>
           </p:cNvPr>
@@ -2686,7 +2686,7 @@
           <p:cNvPr id="7" name="スライド番号プレースホルダー 6">
             <a:extLst>
               <a:ext uri="{FF2B5EF4-FFF2-40B4-BE49-F238E27FC236}">
-                <a16:creationId xmlns:a16="http://schemas.microsoft.com/office/drawing/2014/main" id="{7C2ADA65-A7C9-B0AF-88AF-2D927D8BD842}"/>
+                <a16:creationId xmlns:a16="http://schemas.microsoft.com/office/drawing/2014/main" id="{F6F188A5-3176-249D-B84B-BB4CD75C5ED7}"/>
               </a:ext>
             </a:extLst>
           </p:cNvPr>
@@ -2702,7 +2702,7 @@
           <a:bodyPr/>
           <a:lstStyle/>
           <a:p>
-            <a:fld id="{1C0AD01E-A0A1-4E9F-B5BB-6156A60EDB20}" type="slidenum">
+            <a:fld id="{2EB523E4-75F5-482A-806C-33BDBEB1ADC1}" type="slidenum">
               <a:rPr kumimoji="1" lang="ja-JP" altLang="en-US" smtClean="0"/>
               <a:t>‹#›</a:t>
             </a:fld>
@@ -2713,7 +2713,7 @@
     </p:spTree>
     <p:extLst>
       <p:ext uri="{BB962C8B-B14F-4D97-AF65-F5344CB8AC3E}">
-        <p14:creationId xmlns:p14="http://schemas.microsoft.com/office/powerpoint/2010/main" val="3571966005"/>
+        <p14:creationId xmlns:p14="http://schemas.microsoft.com/office/powerpoint/2010/main" val="1010231022"/>
       </p:ext>
     </p:extLst>
   </p:cSld>
@@ -2745,7 +2745,7 @@
           <p:cNvPr id="2" name="タイトル 1">
             <a:extLst>
               <a:ext uri="{FF2B5EF4-FFF2-40B4-BE49-F238E27FC236}">
-                <a16:creationId xmlns:a16="http://schemas.microsoft.com/office/drawing/2014/main" id="{F8FE33BE-4280-BCD2-C688-757994C1C896}"/>
+                <a16:creationId xmlns:a16="http://schemas.microsoft.com/office/drawing/2014/main" id="{454F1821-5E99-187B-C807-2B9BD1F430A3}"/>
               </a:ext>
             </a:extLst>
           </p:cNvPr>
@@ -2782,7 +2782,7 @@
           <p:cNvPr id="3" name="図プレースホルダー 2">
             <a:extLst>
               <a:ext uri="{FF2B5EF4-FFF2-40B4-BE49-F238E27FC236}">
-                <a16:creationId xmlns:a16="http://schemas.microsoft.com/office/drawing/2014/main" id="{AAB9BCFE-3B09-D650-6ACD-B3C358E5222F}"/>
+                <a16:creationId xmlns:a16="http://schemas.microsoft.com/office/drawing/2014/main" id="{AC0A7E88-0B9B-52DC-FD6D-05630F5C00B3}"/>
               </a:ext>
             </a:extLst>
           </p:cNvPr>
@@ -2849,7 +2849,7 @@
           <p:cNvPr id="4" name="テキスト プレースホルダー 3">
             <a:extLst>
               <a:ext uri="{FF2B5EF4-FFF2-40B4-BE49-F238E27FC236}">
-                <a16:creationId xmlns:a16="http://schemas.microsoft.com/office/drawing/2014/main" id="{B39181EE-9B60-3C6A-4C91-BC5084AC086E}"/>
+                <a16:creationId xmlns:a16="http://schemas.microsoft.com/office/drawing/2014/main" id="{8FC0DCDE-7A62-BC99-F4A5-7F4E9DF5BC7D}"/>
               </a:ext>
             </a:extLst>
           </p:cNvPr>
@@ -2920,7 +2920,7 @@
           <p:cNvPr id="5" name="日付プレースホルダー 4">
             <a:extLst>
               <a:ext uri="{FF2B5EF4-FFF2-40B4-BE49-F238E27FC236}">
-                <a16:creationId xmlns:a16="http://schemas.microsoft.com/office/drawing/2014/main" id="{9967B853-82F8-AC0D-8561-75779C3D7C9B}"/>
+                <a16:creationId xmlns:a16="http://schemas.microsoft.com/office/drawing/2014/main" id="{98861197-D861-9999-4167-81508431D54B}"/>
               </a:ext>
             </a:extLst>
           </p:cNvPr>
@@ -2936,7 +2936,7 @@
           <a:bodyPr/>
           <a:lstStyle/>
           <a:p>
-            <a:fld id="{C606910E-A98E-481D-9CC4-C8B77A34EE55}" type="datetimeFigureOut">
+            <a:fld id="{F009DF12-3B71-43E6-B118-1E05C3EF7468}" type="datetimeFigureOut">
               <a:rPr kumimoji="1" lang="ja-JP" altLang="en-US" smtClean="0"/>
               <a:t>2026/9/20</a:t>
             </a:fld>
@@ -2949,7 +2949,7 @@
           <p:cNvPr id="6" name="フッター プレースホルダー 5">
             <a:extLst>
               <a:ext uri="{FF2B5EF4-FFF2-40B4-BE49-F238E27FC236}">
-                <a16:creationId xmlns:a16="http://schemas.microsoft.com/office/drawing/2014/main" id="{352EB687-C32A-B8A2-343F-D74CB5E8A068}"/>
+                <a16:creationId xmlns:a16="http://schemas.microsoft.com/office/drawing/2014/main" id="{5B2FB4C8-956A-9593-4393-7DD3C7E99DD7}"/>
               </a:ext>
             </a:extLst>
           </p:cNvPr>
@@ -2974,7 +2974,7 @@
           <p:cNvPr id="7" name="スライド番号プレースホルダー 6">
             <a:extLst>
               <a:ext uri="{FF2B5EF4-FFF2-40B4-BE49-F238E27FC236}">
-                <a16:creationId xmlns:a16="http://schemas.microsoft.com/office/drawing/2014/main" id="{0FEA9531-03BB-1AB7-BC3B-87957656B2FF}"/>
+                <a16:creationId xmlns:a16="http://schemas.microsoft.com/office/drawing/2014/main" id="{DDFB0AFB-BE14-4CF6-8BF8-66C9D5D1E42C}"/>
               </a:ext>
             </a:extLst>
           </p:cNvPr>
@@ -2990,7 +2990,7 @@
           <a:bodyPr/>
           <a:lstStyle/>
           <a:p>
-            <a:fld id="{1C0AD01E-A0A1-4E9F-B5BB-6156A60EDB20}" type="slidenum">
+            <a:fld id="{2EB523E4-75F5-482A-806C-33BDBEB1ADC1}" type="slidenum">
               <a:rPr kumimoji="1" lang="ja-JP" altLang="en-US" smtClean="0"/>
               <a:t>‹#›</a:t>
             </a:fld>
@@ -3001,7 +3001,7 @@
     </p:spTree>
     <p:extLst>
       <p:ext uri="{BB962C8B-B14F-4D97-AF65-F5344CB8AC3E}">
-        <p14:creationId xmlns:p14="http://schemas.microsoft.com/office/powerpoint/2010/main" val="1644869358"/>
+        <p14:creationId xmlns:p14="http://schemas.microsoft.com/office/powerpoint/2010/main" val="3661107690"/>
       </p:ext>
     </p:extLst>
   </p:cSld>
@@ -3038,7 +3038,7 @@
           <p:cNvPr id="2" name="タイトル プレースホルダー 1">
             <a:extLst>
               <a:ext uri="{FF2B5EF4-FFF2-40B4-BE49-F238E27FC236}">
-                <a16:creationId xmlns:a16="http://schemas.microsoft.com/office/drawing/2014/main" id="{EFEC3A0A-ED98-6544-218C-744F7B7D5537}"/>
+                <a16:creationId xmlns:a16="http://schemas.microsoft.com/office/drawing/2014/main" id="{FEE5EB34-06AF-0A6B-24DE-AC43DDE6B31F}"/>
               </a:ext>
             </a:extLst>
           </p:cNvPr>
@@ -3076,7 +3076,7 @@
           <p:cNvPr id="3" name="テキスト プレースホルダー 2">
             <a:extLst>
               <a:ext uri="{FF2B5EF4-FFF2-40B4-BE49-F238E27FC236}">
-                <a16:creationId xmlns:a16="http://schemas.microsoft.com/office/drawing/2014/main" id="{88D4C4B1-E19A-986F-7C31-086BF41FB948}"/>
+                <a16:creationId xmlns:a16="http://schemas.microsoft.com/office/drawing/2014/main" id="{2DBB4774-A22B-1C6F-ADE9-3C1F04A14AAF}"/>
               </a:ext>
             </a:extLst>
           </p:cNvPr>
@@ -3175,7 +3175,7 @@
           <p:cNvPr id="4" name="日付プレースホルダー 3">
             <a:extLst>
               <a:ext uri="{FF2B5EF4-FFF2-40B4-BE49-F238E27FC236}">
-                <a16:creationId xmlns:a16="http://schemas.microsoft.com/office/drawing/2014/main" id="{9A2D8F5B-50DE-F22C-405D-DA176203788E}"/>
+                <a16:creationId xmlns:a16="http://schemas.microsoft.com/office/drawing/2014/main" id="{9BB76187-7F8E-D6BF-3FA5-F7FA01FD359C}"/>
               </a:ext>
             </a:extLst>
           </p:cNvPr>
@@ -3209,7 +3209,7 @@
             </a:lvl1pPr>
           </a:lstStyle>
           <a:p>
-            <a:fld id="{C606910E-A98E-481D-9CC4-C8B77A34EE55}" type="datetimeFigureOut">
+            <a:fld id="{F009DF12-3B71-43E6-B118-1E05C3EF7468}" type="datetimeFigureOut">
               <a:rPr kumimoji="1" lang="ja-JP" altLang="en-US" smtClean="0"/>
               <a:t>2026/9/20</a:t>
             </a:fld>
@@ -3222,7 +3222,7 @@
           <p:cNvPr id="5" name="フッター プレースホルダー 4">
             <a:extLst>
               <a:ext uri="{FF2B5EF4-FFF2-40B4-BE49-F238E27FC236}">
-                <a16:creationId xmlns:a16="http://schemas.microsoft.com/office/drawing/2014/main" id="{94959A23-E4A5-AA6C-596F-679944F25A29}"/>
+                <a16:creationId xmlns:a16="http://schemas.microsoft.com/office/drawing/2014/main" id="{B788FF3F-FAD2-6EB6-0837-FCFFA38C66AD}"/>
               </a:ext>
             </a:extLst>
           </p:cNvPr>
@@ -3265,7 +3265,7 @@
           <p:cNvPr id="6" name="スライド番号プレースホルダー 5">
             <a:extLst>
               <a:ext uri="{FF2B5EF4-FFF2-40B4-BE49-F238E27FC236}">
-                <a16:creationId xmlns:a16="http://schemas.microsoft.com/office/drawing/2014/main" id="{EC2F42C1-FEC4-3DA0-7E46-2D67ED17AF0F}"/>
+                <a16:creationId xmlns:a16="http://schemas.microsoft.com/office/drawing/2014/main" id="{2078ACF3-0465-E37D-51CF-16C830A772EE}"/>
               </a:ext>
             </a:extLst>
           </p:cNvPr>
@@ -3299,7 +3299,7 @@
             </a:lvl1pPr>
           </a:lstStyle>
           <a:p>
-            <a:fld id="{1C0AD01E-A0A1-4E9F-B5BB-6156A60EDB20}" type="slidenum">
+            <a:fld id="{2EB523E4-75F5-482A-806C-33BDBEB1ADC1}" type="slidenum">
               <a:rPr kumimoji="1" lang="ja-JP" altLang="en-US" smtClean="0"/>
               <a:t>‹#›</a:t>
             </a:fld>
@@ -3310,7 +3310,7 @@
     </p:spTree>
     <p:extLst>
       <p:ext uri="{BB962C8B-B14F-4D97-AF65-F5344CB8AC3E}">
-        <p14:creationId xmlns:p14="http://schemas.microsoft.com/office/powerpoint/2010/main" val="1716614172"/>
+        <p14:creationId xmlns:p14="http://schemas.microsoft.com/office/powerpoint/2010/main" val="4025488120"/>
       </p:ext>
     </p:extLst>
   </p:cSld>
@@ -3633,7 +3633,7 @@
           <p:cNvPr id="2" name="タイトル 1">
             <a:extLst>
               <a:ext uri="{FF2B5EF4-FFF2-40B4-BE49-F238E27FC236}">
-                <a16:creationId xmlns:a16="http://schemas.microsoft.com/office/drawing/2014/main" id="{78556D4D-3F04-D432-0971-AF686B72A993}"/>
+                <a16:creationId xmlns:a16="http://schemas.microsoft.com/office/drawing/2014/main" id="{07FA04C5-16B8-43DE-01F2-28CE84C35A9F}"/>
               </a:ext>
             </a:extLst>
           </p:cNvPr>
@@ -3663,7 +3663,7 @@
     </p:spTree>
     <p:extLst>
       <p:ext uri="{BB962C8B-B14F-4D97-AF65-F5344CB8AC3E}">
-        <p14:creationId xmlns:p14="http://schemas.microsoft.com/office/powerpoint/2010/main" val="1269546672"/>
+        <p14:creationId xmlns:p14="http://schemas.microsoft.com/office/powerpoint/2010/main" val="1696378102"/>
       </p:ext>
     </p:extLst>
   </p:cSld>
@@ -3695,7 +3695,7 @@
           <p:cNvPr id="2" name="タイトル 1">
             <a:extLst>
               <a:ext uri="{FF2B5EF4-FFF2-40B4-BE49-F238E27FC236}">
-                <a16:creationId xmlns:a16="http://schemas.microsoft.com/office/drawing/2014/main" id="{596BA1B1-4315-BE59-2C32-F63A940065E9}"/>
+                <a16:creationId xmlns:a16="http://schemas.microsoft.com/office/drawing/2014/main" id="{87AEE334-3BA4-F0A5-FDC4-A82303B01FBD}"/>
               </a:ext>
             </a:extLst>
           </p:cNvPr>
@@ -3725,7 +3725,7 @@
     </p:spTree>
     <p:extLst>
       <p:ext uri="{BB962C8B-B14F-4D97-AF65-F5344CB8AC3E}">
-        <p14:creationId xmlns:p14="http://schemas.microsoft.com/office/powerpoint/2010/main" val="2956903001"/>
+        <p14:creationId xmlns:p14="http://schemas.microsoft.com/office/powerpoint/2010/main" val="1802256359"/>
       </p:ext>
     </p:extLst>
   </p:cSld>
@@ -3757,7 +3757,7 @@
           <p:cNvPr id="2" name="タイトル 1">
             <a:extLst>
               <a:ext uri="{FF2B5EF4-FFF2-40B4-BE49-F238E27FC236}">
-                <a16:creationId xmlns:a16="http://schemas.microsoft.com/office/drawing/2014/main" id="{956423D5-32A7-9AB7-E81D-30AB0C58CC4E}"/>
+                <a16:creationId xmlns:a16="http://schemas.microsoft.com/office/drawing/2014/main" id="{5D75816F-53DB-8A79-6495-AE03B50FE736}"/>
               </a:ext>
             </a:extLst>
           </p:cNvPr>
@@ -3787,7 +3787,7 @@
     </p:spTree>
     <p:extLst>
       <p:ext uri="{BB962C8B-B14F-4D97-AF65-F5344CB8AC3E}">
-        <p14:creationId xmlns:p14="http://schemas.microsoft.com/office/powerpoint/2010/main" val="3149068186"/>
+        <p14:creationId xmlns:p14="http://schemas.microsoft.com/office/powerpoint/2010/main" val="870771758"/>
       </p:ext>
     </p:extLst>
   </p:cSld>
